--- a/figures/resources/sampling.pptx
+++ b/figures/resources/sampling.pptx
@@ -245,7 +245,7 @@
           <a:p>
             <a:fld id="{2CACDD28-0A48-0E47-898B-1110AC508CAE}" type="datetimeFigureOut">
               <a:rPr lang="en-DE" smtClean="0"/>
-              <a:t>06/03/2026</a:t>
+              <a:t>6/4/26</a:t>
             </a:fld>
             <a:endParaRPr lang="en-DE"/>
           </a:p>
@@ -415,7 +415,7 @@
           <a:p>
             <a:fld id="{2CACDD28-0A48-0E47-898B-1110AC508CAE}" type="datetimeFigureOut">
               <a:rPr lang="en-DE" smtClean="0"/>
-              <a:t>06/03/2026</a:t>
+              <a:t>6/4/26</a:t>
             </a:fld>
             <a:endParaRPr lang="en-DE"/>
           </a:p>
@@ -595,7 +595,7 @@
           <a:p>
             <a:fld id="{2CACDD28-0A48-0E47-898B-1110AC508CAE}" type="datetimeFigureOut">
               <a:rPr lang="en-DE" smtClean="0"/>
-              <a:t>06/03/2026</a:t>
+              <a:t>6/4/26</a:t>
             </a:fld>
             <a:endParaRPr lang="en-DE"/>
           </a:p>
@@ -765,7 +765,7 @@
           <a:p>
             <a:fld id="{2CACDD28-0A48-0E47-898B-1110AC508CAE}" type="datetimeFigureOut">
               <a:rPr lang="en-DE" smtClean="0"/>
-              <a:t>06/03/2026</a:t>
+              <a:t>6/4/26</a:t>
             </a:fld>
             <a:endParaRPr lang="en-DE"/>
           </a:p>
@@ -1011,7 +1011,7 @@
           <a:p>
             <a:fld id="{2CACDD28-0A48-0E47-898B-1110AC508CAE}" type="datetimeFigureOut">
               <a:rPr lang="en-DE" smtClean="0"/>
-              <a:t>06/03/2026</a:t>
+              <a:t>6/4/26</a:t>
             </a:fld>
             <a:endParaRPr lang="en-DE"/>
           </a:p>
@@ -1243,7 +1243,7 @@
           <a:p>
             <a:fld id="{2CACDD28-0A48-0E47-898B-1110AC508CAE}" type="datetimeFigureOut">
               <a:rPr lang="en-DE" smtClean="0"/>
-              <a:t>06/03/2026</a:t>
+              <a:t>6/4/26</a:t>
             </a:fld>
             <a:endParaRPr lang="en-DE"/>
           </a:p>
@@ -1610,7 +1610,7 @@
           <a:p>
             <a:fld id="{2CACDD28-0A48-0E47-898B-1110AC508CAE}" type="datetimeFigureOut">
               <a:rPr lang="en-DE" smtClean="0"/>
-              <a:t>06/03/2026</a:t>
+              <a:t>6/4/26</a:t>
             </a:fld>
             <a:endParaRPr lang="en-DE"/>
           </a:p>
@@ -1728,7 +1728,7 @@
           <a:p>
             <a:fld id="{2CACDD28-0A48-0E47-898B-1110AC508CAE}" type="datetimeFigureOut">
               <a:rPr lang="en-DE" smtClean="0"/>
-              <a:t>06/03/2026</a:t>
+              <a:t>6/4/26</a:t>
             </a:fld>
             <a:endParaRPr lang="en-DE"/>
           </a:p>
@@ -1823,7 +1823,7 @@
           <a:p>
             <a:fld id="{2CACDD28-0A48-0E47-898B-1110AC508CAE}" type="datetimeFigureOut">
               <a:rPr lang="en-DE" smtClean="0"/>
-              <a:t>06/03/2026</a:t>
+              <a:t>6/4/26</a:t>
             </a:fld>
             <a:endParaRPr lang="en-DE"/>
           </a:p>
@@ -2100,7 +2100,7 @@
           <a:p>
             <a:fld id="{2CACDD28-0A48-0E47-898B-1110AC508CAE}" type="datetimeFigureOut">
               <a:rPr lang="en-DE" smtClean="0"/>
-              <a:t>06/03/2026</a:t>
+              <a:t>6/4/26</a:t>
             </a:fld>
             <a:endParaRPr lang="en-DE"/>
           </a:p>
@@ -2357,7 +2357,7 @@
           <a:p>
             <a:fld id="{2CACDD28-0A48-0E47-898B-1110AC508CAE}" type="datetimeFigureOut">
               <a:rPr lang="en-DE" smtClean="0"/>
-              <a:t>06/03/2026</a:t>
+              <a:t>6/4/26</a:t>
             </a:fld>
             <a:endParaRPr lang="en-DE"/>
           </a:p>
@@ -2570,7 +2570,7 @@
           <a:p>
             <a:fld id="{2CACDD28-0A48-0E47-898B-1110AC508CAE}" type="datetimeFigureOut">
               <a:rPr lang="en-DE" smtClean="0"/>
-              <a:t>06/03/2026</a:t>
+              <a:t>6/4/26</a:t>
             </a:fld>
             <a:endParaRPr lang="en-DE"/>
           </a:p>
@@ -3080,7 +3080,7 @@
         </p:blipFill>
         <p:spPr>
           <a:xfrm>
-            <a:off x="4777683" y="8750505"/>
+            <a:off x="6650022" y="8750505"/>
             <a:ext cx="15843976" cy="4791525"/>
           </a:xfrm>
           <a:prstGeom prst="rect">
@@ -3115,7 +3115,7 @@
         </p:blipFill>
         <p:spPr>
           <a:xfrm>
-            <a:off x="3711012" y="1348390"/>
+            <a:off x="5583351" y="1348390"/>
             <a:ext cx="17683922" cy="7158793"/>
           </a:xfrm>
           <a:prstGeom prst="rect">
@@ -3137,7 +3137,7 @@
         </p:nvSpPr>
         <p:spPr>
           <a:xfrm>
-            <a:off x="5436939" y="7591820"/>
+            <a:off x="7309278" y="7591820"/>
             <a:ext cx="817754" cy="673965"/>
           </a:xfrm>
           <a:prstGeom prst="rect">
@@ -3189,7 +3189,7 @@
         </p:nvSpPr>
         <p:spPr>
           <a:xfrm>
-            <a:off x="17260320" y="7591820"/>
+            <a:off x="19132659" y="7591820"/>
             <a:ext cx="817754" cy="673965"/>
           </a:xfrm>
           <a:prstGeom prst="rect">
@@ -3241,7 +3241,7 @@
         </p:nvSpPr>
         <p:spPr>
           <a:xfrm>
-            <a:off x="11348629" y="7591820"/>
+            <a:off x="13220968" y="7591820"/>
             <a:ext cx="817754" cy="673965"/>
           </a:xfrm>
           <a:prstGeom prst="rect">
@@ -3293,7 +3293,7 @@
         </p:nvSpPr>
         <p:spPr>
           <a:xfrm>
-            <a:off x="3711012" y="-1"/>
+            <a:off x="5583351" y="-1"/>
             <a:ext cx="17683922" cy="1430215"/>
           </a:xfrm>
           <a:prstGeom prst="leftArrow">
@@ -3329,6 +3329,157 @@
               <a:t>Pixelsize</a:t>
             </a:r>
             <a:endParaRPr lang="en-US" sz="5400" dirty="0"/>
+          </a:p>
+        </p:txBody>
+      </p:sp>
+      <p:sp>
+        <p:nvSpPr>
+          <p:cNvPr id="2" name="Triangle 1">
+            <a:extLst>
+              <a:ext uri="{FF2B5EF4-FFF2-40B4-BE49-F238E27FC236}">
+                <a16:creationId xmlns:a16="http://schemas.microsoft.com/office/drawing/2014/main" id="{E54CD63A-1782-7EE9-C499-CFE3B82C8D03}"/>
+              </a:ext>
+            </a:extLst>
+          </p:cNvPr>
+          <p:cNvSpPr/>
+          <p:nvPr/>
+        </p:nvSpPr>
+        <p:spPr>
+          <a:xfrm>
+            <a:off x="937201" y="8194854"/>
+            <a:ext cx="4245428" cy="4172756"/>
+          </a:xfrm>
+          <a:prstGeom prst="triangle">
+            <a:avLst/>
+          </a:prstGeom>
+        </p:spPr>
+        <p:style>
+          <a:lnRef idx="2">
+            <a:schemeClr val="accent1">
+              <a:shade val="15000"/>
+            </a:schemeClr>
+          </a:lnRef>
+          <a:fillRef idx="1">
+            <a:schemeClr val="accent1"/>
+          </a:fillRef>
+          <a:effectRef idx="0">
+            <a:schemeClr val="accent1"/>
+          </a:effectRef>
+          <a:fontRef idx="minor">
+            <a:schemeClr val="lt1"/>
+          </a:fontRef>
+        </p:style>
+        <p:txBody>
+          <a:bodyPr rtlCol="0" anchor="ctr"/>
+          <a:lstStyle/>
+          <a:p>
+            <a:pPr algn="ctr"/>
+            <a:endParaRPr lang="en-US"/>
+          </a:p>
+        </p:txBody>
+      </p:sp>
+      <p:sp>
+        <p:nvSpPr>
+          <p:cNvPr id="3" name="TextBox 2">
+            <a:extLst>
+              <a:ext uri="{FF2B5EF4-FFF2-40B4-BE49-F238E27FC236}">
+                <a16:creationId xmlns:a16="http://schemas.microsoft.com/office/drawing/2014/main" id="{B620BD1F-C666-55DD-12B4-36A59FFAA199}"/>
+              </a:ext>
+            </a:extLst>
+          </p:cNvPr>
+          <p:cNvSpPr txBox="1"/>
+          <p:nvPr/>
+        </p:nvSpPr>
+        <p:spPr>
+          <a:xfrm>
+            <a:off x="1972982" y="7548523"/>
+            <a:ext cx="2173865" cy="646331"/>
+          </a:xfrm>
+          <a:prstGeom prst="rect">
+            <a:avLst/>
+          </a:prstGeom>
+          <a:noFill/>
+        </p:spPr>
+        <p:txBody>
+          <a:bodyPr wrap="none" rtlCol="0">
+            <a:spAutoFit/>
+          </a:bodyPr>
+          <a:lstStyle/>
+          <a:p>
+            <a:r>
+              <a:rPr lang="en-US" sz="3600" dirty="0"/>
+              <a:t>Resolution</a:t>
+            </a:r>
+          </a:p>
+        </p:txBody>
+      </p:sp>
+      <p:sp>
+        <p:nvSpPr>
+          <p:cNvPr id="4" name="TextBox 3">
+            <a:extLst>
+              <a:ext uri="{FF2B5EF4-FFF2-40B4-BE49-F238E27FC236}">
+                <a16:creationId xmlns:a16="http://schemas.microsoft.com/office/drawing/2014/main" id="{7605BEDB-CE9B-06A6-B39A-E69FF0194B42}"/>
+              </a:ext>
+            </a:extLst>
+          </p:cNvPr>
+          <p:cNvSpPr txBox="1"/>
+          <p:nvPr/>
+        </p:nvSpPr>
+        <p:spPr>
+          <a:xfrm>
+            <a:off x="88115" y="12529164"/>
+            <a:ext cx="1443024" cy="646331"/>
+          </a:xfrm>
+          <a:prstGeom prst="rect">
+            <a:avLst/>
+          </a:prstGeom>
+          <a:noFill/>
+        </p:spPr>
+        <p:txBody>
+          <a:bodyPr wrap="none" rtlCol="0">
+            <a:spAutoFit/>
+          </a:bodyPr>
+          <a:lstStyle/>
+          <a:p>
+            <a:r>
+              <a:rPr lang="en-US" sz="3600" dirty="0"/>
+              <a:t>Speed </a:t>
+            </a:r>
+          </a:p>
+        </p:txBody>
+      </p:sp>
+      <p:sp>
+        <p:nvSpPr>
+          <p:cNvPr id="5" name="TextBox 4">
+            <a:extLst>
+              <a:ext uri="{FF2B5EF4-FFF2-40B4-BE49-F238E27FC236}">
+                <a16:creationId xmlns:a16="http://schemas.microsoft.com/office/drawing/2014/main" id="{DF775640-54DB-0A60-9B68-19B979BA1DE9}"/>
+              </a:ext>
+            </a:extLst>
+          </p:cNvPr>
+          <p:cNvSpPr txBox="1"/>
+          <p:nvPr/>
+        </p:nvSpPr>
+        <p:spPr>
+          <a:xfrm>
+            <a:off x="4329183" y="12529163"/>
+            <a:ext cx="2090637" cy="646331"/>
+          </a:xfrm>
+          <a:prstGeom prst="rect">
+            <a:avLst/>
+          </a:prstGeom>
+          <a:noFill/>
+        </p:spPr>
+        <p:txBody>
+          <a:bodyPr wrap="none" rtlCol="0">
+            <a:spAutoFit/>
+          </a:bodyPr>
+          <a:lstStyle/>
+          <a:p>
+            <a:r>
+              <a:rPr lang="en-US" sz="3600" dirty="0"/>
+              <a:t>Sensitivity</a:t>
+            </a:r>
           </a:p>
         </p:txBody>
       </p:sp>
